--- a/templates/carousels/posts/07-10-2026-wed-graduate.pptx
+++ b/templates/carousels/posts/07-10-2026-wed-graduate.pptx
@@ -3813,7 +3813,7 @@
     <p:bg>
       <p:bgPr>
         <a:solidFill>
-          <a:srgbClr val="22371F"/>
+          <a:srgbClr val="1E3F1D"/>
         </a:solidFill>
         <a:effectLst/>
       </p:bgPr>
@@ -3840,7 +3840,7 @@
             <a:avLst/>
           </a:prstGeom>
           <a:solidFill>
-            <a:srgbClr val="A7B097"/>
+            <a:srgbClr val="B1BCB1"/>
           </a:solidFill>
           <a:ln>
             <a:noFill/>
@@ -3895,7 +3895,7 @@
             <a:r>
               <a:rPr sz="3000" b="1" i="0">
                 <a:solidFill>
-                  <a:srgbClr val="22371F"/>
+                  <a:srgbClr val="1E3F1D"/>
                 </a:solidFill>
                 <a:latin typeface="Montserrat"/>
               </a:rPr>
@@ -3907,7 +3907,7 @@
             <a:r>
               <a:rPr sz="3000" b="1" i="0">
                 <a:solidFill>
-                  <a:srgbClr val="22371F"/>
+                  <a:srgbClr val="1E3F1D"/>
                 </a:solidFill>
                 <a:latin typeface="Montserrat"/>
               </a:rPr>
@@ -3931,7 +3931,7 @@
             <a:avLst/>
           </a:prstGeom>
           <a:solidFill>
-            <a:srgbClr val="22371F"/>
+            <a:srgbClr val="1E3F1D"/>
           </a:solidFill>
           <a:ln>
             <a:noFill/>
@@ -3986,7 +3986,7 @@
             <a:r>
               <a:rPr sz="3000" b="1" i="0">
                 <a:solidFill>
-                  <a:srgbClr val="DBE6A7"/>
+                  <a:srgbClr val="B1BCB1"/>
                 </a:solidFill>
                 <a:latin typeface="Montserrat"/>
               </a:rPr>
@@ -4076,7 +4076,7 @@
             <a:r>
               <a:rPr sz="3000" b="0" i="1">
                 <a:solidFill>
-                  <a:srgbClr val="DBE6A7"/>
+                  <a:srgbClr val="B1BCB1"/>
                 </a:solidFill>
                 <a:latin typeface="EB Garamond"/>
               </a:rPr>
@@ -4100,7 +4100,7 @@
             <a:avLst/>
           </a:prstGeom>
           <a:solidFill>
-            <a:srgbClr val="DBE6A7"/>
+            <a:srgbClr val="B1BCB1"/>
           </a:solidFill>
           <a:ln>
             <a:noFill/>
@@ -4319,7 +4319,7 @@
     <p:bg>
       <p:bgPr>
         <a:solidFill>
-          <a:srgbClr val="F4F1EA"/>
+          <a:srgbClr val="F3F1EA"/>
         </a:solidFill>
         <a:effectLst/>
       </p:bgPr>
@@ -4346,7 +4346,7 @@
             <a:avLst/>
           </a:prstGeom>
           <a:solidFill>
-            <a:srgbClr val="A7B097"/>
+            <a:srgbClr val="B1BCB1"/>
           </a:solidFill>
           <a:ln>
             <a:noFill/>
@@ -4401,7 +4401,7 @@
             <a:r>
               <a:rPr sz="3000" b="1" i="0">
                 <a:solidFill>
-                  <a:srgbClr val="22371F"/>
+                  <a:srgbClr val="1E3F1D"/>
                 </a:solidFill>
                 <a:latin typeface="Montserrat"/>
               </a:rPr>
@@ -4413,7 +4413,7 @@
             <a:r>
               <a:rPr sz="3000" b="1" i="0">
                 <a:solidFill>
-                  <a:srgbClr val="22371F"/>
+                  <a:srgbClr val="1E3F1D"/>
                 </a:solidFill>
                 <a:latin typeface="Montserrat"/>
               </a:rPr>
@@ -4448,7 +4448,7 @@
             <a:r>
               <a:rPr sz="3000" b="1" i="0">
                 <a:solidFill>
-                  <a:srgbClr val="156826"/>
+                  <a:srgbClr val="31662F"/>
                 </a:solidFill>
                 <a:latin typeface="Montserrat"/>
               </a:rPr>
@@ -4487,7 +4487,7 @@
             <a:r>
               <a:rPr sz="5700" b="0" i="0">
                 <a:solidFill>
-                  <a:srgbClr val="22371F"/>
+                  <a:srgbClr val="1E3F1D"/>
                 </a:solidFill>
                 <a:latin typeface="EB Garamond"/>
               </a:rPr>
@@ -4546,7 +4546,7 @@
             <a:avLst/>
           </a:prstGeom>
           <a:solidFill>
-            <a:srgbClr val="A7B097"/>
+            <a:srgbClr val="B1BCB1"/>
           </a:solidFill>
           <a:ln>
             <a:noFill/>
@@ -4590,7 +4590,7 @@
             <a:avLst/>
           </a:prstGeom>
           <a:solidFill>
-            <a:srgbClr val="156826"/>
+            <a:srgbClr val="31662F"/>
           </a:solidFill>
           <a:ln>
             <a:noFill/>
@@ -4634,7 +4634,7 @@
             <a:avLst/>
           </a:prstGeom>
           <a:solidFill>
-            <a:srgbClr val="A7B097"/>
+            <a:srgbClr val="B1BCB1"/>
           </a:solidFill>
           <a:ln>
             <a:noFill/>
@@ -4678,7 +4678,7 @@
             <a:avLst/>
           </a:prstGeom>
           <a:solidFill>
-            <a:srgbClr val="A7B097"/>
+            <a:srgbClr val="B1BCB1"/>
           </a:solidFill>
           <a:ln>
             <a:noFill/>
@@ -4722,7 +4722,7 @@
             <a:avLst/>
           </a:prstGeom>
           <a:solidFill>
-            <a:srgbClr val="A7B097"/>
+            <a:srgbClr val="B1BCB1"/>
           </a:solidFill>
           <a:ln>
             <a:noFill/>
@@ -4803,7 +4803,7 @@
             <a:r>
               <a:rPr sz="3000" b="1" i="0">
                 <a:solidFill>
-                  <a:srgbClr val="156826"/>
+                  <a:srgbClr val="31662F"/>
                 </a:solidFill>
                 <a:latin typeface="Montserrat"/>
               </a:rPr>
@@ -4842,7 +4842,7 @@
             <a:r>
               <a:rPr sz="5700" b="1" i="0">
                 <a:solidFill>
-                  <a:srgbClr val="22371F"/>
+                  <a:srgbClr val="1E3F1D"/>
                 </a:solidFill>
                 <a:latin typeface="Montserrat"/>
               </a:rPr>
@@ -4866,7 +4866,7 @@
             <a:avLst/>
           </a:prstGeom>
           <a:solidFill>
-            <a:srgbClr val="156826"/>
+            <a:srgbClr val="31662F"/>
           </a:solidFill>
           <a:ln>
             <a:noFill/>
@@ -4980,7 +4980,7 @@
             <a:avLst/>
           </a:prstGeom>
           <a:solidFill>
-            <a:srgbClr val="A7B097"/>
+            <a:srgbClr val="B1BCB1"/>
           </a:solidFill>
           <a:ln>
             <a:noFill/>
@@ -5024,7 +5024,7 @@
             <a:avLst/>
           </a:prstGeom>
           <a:solidFill>
-            <a:srgbClr val="A7B097"/>
+            <a:srgbClr val="B1BCB1"/>
           </a:solidFill>
           <a:ln>
             <a:noFill/>
@@ -5068,7 +5068,7 @@
             <a:avLst/>
           </a:prstGeom>
           <a:solidFill>
-            <a:srgbClr val="156826"/>
+            <a:srgbClr val="31662F"/>
           </a:solidFill>
           <a:ln>
             <a:noFill/>
@@ -5112,7 +5112,7 @@
             <a:avLst/>
           </a:prstGeom>
           <a:solidFill>
-            <a:srgbClr val="A7B097"/>
+            <a:srgbClr val="B1BCB1"/>
           </a:solidFill>
           <a:ln>
             <a:noFill/>
@@ -5156,7 +5156,7 @@
             <a:avLst/>
           </a:prstGeom>
           <a:solidFill>
-            <a:srgbClr val="A7B097"/>
+            <a:srgbClr val="B1BCB1"/>
           </a:solidFill>
           <a:ln>
             <a:noFill/>
@@ -5199,7 +5199,7 @@
     <p:bg>
       <p:bgPr>
         <a:solidFill>
-          <a:srgbClr val="22371F"/>
+          <a:srgbClr val="1E3F1D"/>
         </a:solidFill>
         <a:effectLst/>
       </p:bgPr>
@@ -5237,7 +5237,7 @@
             <a:r>
               <a:rPr sz="3000" b="1" i="0">
                 <a:solidFill>
-                  <a:srgbClr val="DBE6A7"/>
+                  <a:srgbClr val="B1BCB1"/>
                 </a:solidFill>
                 <a:latin typeface="Montserrat"/>
               </a:rPr>
@@ -5272,7 +5272,7 @@
             <a:r>
               <a:rPr sz="3000" b="1" i="0">
                 <a:solidFill>
-                  <a:srgbClr val="C9A227"/>
+                  <a:srgbClr val="D39C48"/>
                 </a:solidFill>
                 <a:latin typeface="Montserrat"/>
               </a:rPr>
@@ -5307,7 +5307,7 @@
             <a:r>
               <a:rPr sz="12750" b="1" i="0">
                 <a:solidFill>
-                  <a:srgbClr val="C9A227"/>
+                  <a:srgbClr val="D39C48"/>
                 </a:solidFill>
                 <a:latin typeface="Montserrat"/>
               </a:rPr>
@@ -5377,7 +5377,7 @@
             <a:r>
               <a:rPr sz="3000" b="0" i="0">
                 <a:solidFill>
-                  <a:srgbClr val="A7B097"/>
+                  <a:srgbClr val="B1BCB1"/>
                 </a:solidFill>
                 <a:latin typeface="Source Sans 3"/>
               </a:rPr>
@@ -5412,7 +5412,7 @@
             <a:r>
               <a:rPr sz="3000" b="1" i="0">
                 <a:solidFill>
-                  <a:srgbClr val="A7B097"/>
+                  <a:srgbClr val="B1BCB1"/>
                 </a:solidFill>
                 <a:latin typeface="Montserrat"/>
               </a:rPr>
@@ -5568,7 +5568,7 @@
             <a:avLst/>
           </a:prstGeom>
           <a:solidFill>
-            <a:srgbClr val="DBE6A7"/>
+            <a:srgbClr val="B1BCB1"/>
           </a:solidFill>
           <a:ln>
             <a:noFill/>
@@ -5655,7 +5655,7 @@
     <p:bg>
       <p:bgPr>
         <a:solidFill>
-          <a:srgbClr val="F4F1EA"/>
+          <a:srgbClr val="F3F1EA"/>
         </a:solidFill>
         <a:effectLst/>
       </p:bgPr>
@@ -5693,7 +5693,7 @@
             <a:r>
               <a:rPr sz="19500" b="1" i="0">
                 <a:solidFill>
-                  <a:srgbClr val="156826"/>
+                  <a:srgbClr val="31662F"/>
                 </a:solidFill>
                 <a:latin typeface="EB Garamond"/>
               </a:rPr>
@@ -5732,7 +5732,7 @@
             <a:r>
               <a:rPr sz="5700" b="0" i="1">
                 <a:solidFill>
-                  <a:srgbClr val="22371F"/>
+                  <a:srgbClr val="1E3F1D"/>
                 </a:solidFill>
                 <a:latin typeface="EB Garamond"/>
               </a:rPr>
@@ -5767,7 +5767,7 @@
             <a:r>
               <a:rPr sz="3000" b="1" i="0">
                 <a:solidFill>
-                  <a:srgbClr val="156826"/>
+                  <a:srgbClr val="31662F"/>
                 </a:solidFill>
                 <a:latin typeface="Montserrat"/>
               </a:rPr>
@@ -5826,7 +5826,7 @@
             <a:avLst/>
           </a:prstGeom>
           <a:solidFill>
-            <a:srgbClr val="A7B097"/>
+            <a:srgbClr val="B1BCB1"/>
           </a:solidFill>
           <a:ln>
             <a:noFill/>
@@ -5870,7 +5870,7 @@
             <a:avLst/>
           </a:prstGeom>
           <a:solidFill>
-            <a:srgbClr val="A7B097"/>
+            <a:srgbClr val="B1BCB1"/>
           </a:solidFill>
           <a:ln>
             <a:noFill/>
@@ -5914,7 +5914,7 @@
             <a:avLst/>
           </a:prstGeom>
           <a:solidFill>
-            <a:srgbClr val="A7B097"/>
+            <a:srgbClr val="B1BCB1"/>
           </a:solidFill>
           <a:ln>
             <a:noFill/>
@@ -5958,7 +5958,7 @@
             <a:avLst/>
           </a:prstGeom>
           <a:solidFill>
-            <a:srgbClr val="A7B097"/>
+            <a:srgbClr val="B1BCB1"/>
           </a:solidFill>
           <a:ln>
             <a:noFill/>
@@ -6002,7 +6002,7 @@
             <a:avLst/>
           </a:prstGeom>
           <a:solidFill>
-            <a:srgbClr val="156826"/>
+            <a:srgbClr val="31662F"/>
           </a:solidFill>
           <a:ln>
             <a:noFill/>
